--- a/Gridlock_ML_Mavericks_Presentation.pptx
+++ b/Gridlock_ML_Mavericks_Presentation.pptx
@@ -3152,7 +3152,7 @@
         <p:spPr>
           <a:xfrm>
             <a:off x="1371600" y="1828800"/>
-            <a:ext cx="9601200" cy="1097280"/>
+            <a:ext cx="9601200" cy="830997"/>
           </a:xfrm>
           <a:prstGeom prst="rect">
             <a:avLst/>
@@ -3174,6 +3174,11 @@
               </a:defRPr>
             </a:pPr>
             <a:r>
+              <a:rPr>
+                <a:solidFill>
+                  <a:schemeClr val="tx2"/>
+                </a:solidFill>
+              </a:rPr>
               <a:t>Grid Unlock Command</a:t>
             </a:r>
           </a:p>
@@ -3210,6 +3215,7 @@
               </a:defRPr>
             </a:pPr>
             <a:r>
+              <a:rPr dirty="0"/>
               <a:t>Real-Time Event Congestion Command Center for Bengaluru Traffic Police</a:t>
             </a:r>
           </a:p>
@@ -3260,7 +3266,7 @@
         <p:spPr>
           <a:xfrm>
             <a:off x="1371600" y="5120640"/>
-            <a:ext cx="9601200" cy="731520"/>
+            <a:ext cx="9601200" cy="461665"/>
           </a:xfrm>
           <a:prstGeom prst="rect">
             <a:avLst/>
@@ -3282,11 +3288,51 @@
               </a:defRPr>
             </a:pPr>
             <a:r>
-              <a:t>TEAM: THE ML MAVERICS</a:t>
-            </a:r>
-            <a:br/>
-            <a:r>
-              <a:t>Eaknath M S (Lead)  |  Ashish D  |  Sabarishh P  |  Prasanth Kanaga Sabai S</a:t>
+              <a:rPr dirty="0">
+                <a:solidFill>
+                  <a:schemeClr val="tx2"/>
+                </a:solidFill>
+              </a:rPr>
+              <a:t>TEAM: THE ML MAVERI</a:t>
+            </a:r>
+            <a:r>
+              <a:rPr lang="en-IN" dirty="0">
+                <a:solidFill>
+                  <a:schemeClr val="tx2"/>
+                </a:solidFill>
+              </a:rPr>
+              <a:t>C</a:t>
+            </a:r>
+            <a:r>
+              <a:rPr dirty="0">
+                <a:solidFill>
+                  <a:schemeClr val="tx2"/>
+                </a:solidFill>
+              </a:rPr>
+              <a:t>S</a:t>
+            </a:r>
+            <a:br>
+              <a:rPr dirty="0">
+                <a:solidFill>
+                  <a:schemeClr val="tx2"/>
+                </a:solidFill>
+              </a:rPr>
+            </a:br>
+            <a:r>
+              <a:rPr dirty="0" err="1">
+                <a:solidFill>
+                  <a:schemeClr val="tx2"/>
+                </a:solidFill>
+              </a:rPr>
+              <a:t>Eaknath</a:t>
+            </a:r>
+            <a:r>
+              <a:rPr dirty="0">
+                <a:solidFill>
+                  <a:schemeClr val="tx2"/>
+                </a:solidFill>
+              </a:rPr>
+              <a:t> M S (Lead)  |  Ashish D  |  Sabarishh P  |  Prasanth Kanaga Sabai S</a:t>
             </a:r>
           </a:p>
         </p:txBody>
